--- a/lectures/L10.pptx
+++ b/lectures/L10.pptx
@@ -7503,7 +7503,7 @@
           <a:p>
             <a:fld id="{2A8A781A-1859-4C85-BF75-12C8100C455E}" type="datetimeFigureOut">
               <a:rPr lang="nb-NO" smtClean="0"/>
-              <a:t>22.09.2026</a:t>
+              <a:t>28.09.2026</a:t>
             </a:fld>
             <a:endParaRPr lang="nb-NO" dirty="0"/>
           </a:p>
@@ -7680,7 +7680,7 @@
           <a:p>
             <a:fld id="{8B442447-825E-F44A-AE66-BBD0FC2F1FF6}" type="datetimeFigureOut">
               <a:rPr lang="nb-NO" smtClean="0"/>
-              <a:t>22.09.2026</a:t>
+              <a:t>28.09.2026</a:t>
             </a:fld>
             <a:endParaRPr lang="nb-NO" dirty="0"/>
           </a:p>
@@ -15969,7 +15969,7 @@
         <p:spPr>
           <a:xfrm>
             <a:off x="500000" y="3872500"/>
-            <a:ext cx="8144000" cy="700000"/>
+            <a:ext cx="8144000" cy="415498"/>
           </a:xfrm>
           <a:prstGeom prst="rect">
             <a:avLst/>
@@ -15984,8 +15984,16 @@
           <a:p>
             <a:pPr algn="ctr"/>
             <a:r>
-              <a:rPr sz="1050" i="1"/>
-              <a:t>Source: Deloitte Annual Review of Football Finance. Caution: this period also saw the Sky/Premier League TV-rights boom — the rise is associated with Bosman, not proven to be caused by it alone.</a:t>
+              <a:rPr sz="1050" i="1" dirty="0"/>
+              <a:t>Source: Deloitte Annual Review of Football Finance. Caution: this period also saw the Sky/Premier League TV-rights boom </a:t>
+            </a:r>
+            <a:r>
+              <a:rPr lang="it-IT" sz="1050" i="1" dirty="0"/>
+              <a:t>,</a:t>
+            </a:r>
+            <a:r>
+              <a:rPr sz="1050" i="1" dirty="0"/>
+              <a:t> the rise is associated with Bosman, not proven to be caused by it alone.</a:t>
             </a:r>
           </a:p>
         </p:txBody>
@@ -16053,7 +16061,15 @@
           <a:p>
             <a:r>
               <a:rPr dirty="0"/>
-              <a:t>At club level: research finds Bosman is associated with REDUCED competitive balance — big clubs could now acquire top out-of-contract talent without paying a fee, and smaller clubs increasingly became net sellers rather than competitors</a:t>
+              <a:t>At club level: research finds Bosman is associated with REDUCED competitive balance</a:t>
+            </a:r>
+            <a:r>
+              <a:rPr lang="it-IT" dirty="0"/>
+              <a:t>:</a:t>
+            </a:r>
+            <a:r>
+              <a:rPr dirty="0"/>
+              <a:t> big clubs could now acquire top out-of-contract talent without paying a fee, and smaller clubs increasingly became net sellers rather than competitors</a:t>
             </a:r>
           </a:p>
           <a:p>
@@ -16066,7 +16082,15 @@
             <a:pPr lvl="1"/>
             <a:r>
               <a:rPr dirty="0"/>
-              <a:t>Why? Smaller football nations, facing tougher competition for talent, invested more in youth development — raising the quality of players they produced</a:t>
+              <a:t>Why? Smaller football nations, facing tougher competition for talent, invested more in youth development</a:t>
+            </a:r>
+            <a:r>
+              <a:rPr lang="it-IT" dirty="0"/>
+              <a:t>, </a:t>
+            </a:r>
+            <a:r>
+              <a:rPr dirty="0"/>
+              <a:t>raising the quality of players they produced</a:t>
             </a:r>
           </a:p>
           <a:p>
@@ -16188,22 +16212,42 @@
           <a:lstStyle/>
           <a:p>
             <a:r>
+              <a:rPr dirty="0"/>
               <a:t>Free agency gave players (and by extension their agents) real leverage at the negotiating table for the first time</a:t>
             </a:r>
           </a:p>
           <a:p>
             <a:r>
+              <a:rPr dirty="0"/>
               <a:t>A credible “I can just leave for free” threat is worth far more in a negotiation than a threat that requires your club’s cooperation</a:t>
             </a:r>
           </a:p>
           <a:p>
             <a:r>
-              <a:t>Agents became central to contract negotiations, transfer deals, and commercial arrangements — and their commissions grew alongside rising transfer and wage sums (amplified further by the same TV-rights boom noted on the previous slide)</a:t>
-            </a:r>
-          </a:p>
-          <a:p>
-            <a:r>
-              <a:t>This is a qualitative, widely reported consequence of Bosman — precise historical data on agent numbers/earnings in the 1990s is not well documented, so treat it as a trend rather than a hard statistic</a:t>
+              <a:rPr dirty="0"/>
+              <a:t>Agents became central to contract negotiations, transfer deals, and commercial arrangements</a:t>
+            </a:r>
+            <a:r>
+              <a:rPr lang="it-IT" dirty="0"/>
+              <a:t>, </a:t>
+            </a:r>
+            <a:r>
+              <a:rPr dirty="0"/>
+              <a:t>and their commissions grew alongside rising transfer and wage sums (amplified further by the same TV-rights boom noted on the previous slide)</a:t>
+            </a:r>
+          </a:p>
+          <a:p>
+            <a:r>
+              <a:rPr dirty="0"/>
+              <a:t>This is a qualitative, widely reported consequence of Bosman</a:t>
+            </a:r>
+            <a:r>
+              <a:rPr lang="it-IT" dirty="0"/>
+              <a:t>, </a:t>
+            </a:r>
+            <a:r>
+              <a:rPr dirty="0"/>
+              <a:t>precise historical data on agent numbers/earnings in the 1990s is not well documented, so treat it as a trend rather than a hard statistic</a:t>
             </a:r>
           </a:p>
         </p:txBody>
@@ -16270,26 +16314,42 @@
           <a:lstStyle/>
           <a:p>
             <a:r>
+              <a:rPr dirty="0"/>
               <a:t>Before 1995, clubs held real monopsony power over players — even after a contract ended</a:t>
             </a:r>
           </a:p>
           <a:p>
             <a:r>
+              <a:rPr dirty="0"/>
               <a:t>The ECJ’s Bosman ruling (1995) ended fee-for-out-of-contract transfers and abolished EU nationality quotas, on freedom-of-movement grounds</a:t>
             </a:r>
           </a:p>
           <a:p>
             <a:r>
-              <a:t>Removing monopsony power moved wages toward the competitive level — and the data show a real jump in the wage share of revenue</a:t>
-            </a:r>
-          </a:p>
-          <a:p>
-            <a:r>
+              <a:rPr dirty="0"/>
+              <a:t>Removing monopsony power moved wages toward the competitive level</a:t>
+            </a:r>
+            <a:r>
+              <a:rPr lang="it-IT"/>
+              <a:t>, </a:t>
+            </a:r>
+            <a:r>
+              <a:t>and </a:t>
+            </a:r>
+            <a:r>
+              <a:rPr dirty="0"/>
+              <a:t>the data show a real jump in the wage share of revenue</a:t>
+            </a:r>
+          </a:p>
+          <a:p>
+            <a:r>
+              <a:rPr dirty="0"/>
               <a:t>The effects were not uniformly “good”: club-level competitive balance may have worsened even as national-team balance improved</a:t>
             </a:r>
           </a:p>
           <a:p>
             <a:r>
+              <a:rPr dirty="0"/>
               <a:t>Bosman is one of the two forces (with rising TV revenue) that set up the conditions Financial Fair Play was later built to address</a:t>
             </a:r>
           </a:p>
@@ -16357,28 +16417,46 @@
           <a:lstStyle/>
           <a:p>
             <a:r>
+              <a:rPr dirty="0"/>
               <a:t>The transfer system before 1995</a:t>
             </a:r>
           </a:p>
           <a:p>
             <a:r>
+              <a:rPr dirty="0"/>
               <a:t>Jean-Marc Bosman and the legal challenge</a:t>
             </a:r>
           </a:p>
           <a:p>
             <a:r>
+              <a:rPr dirty="0"/>
               <a:t>The 1995 ECJ ruling</a:t>
             </a:r>
           </a:p>
           <a:p>
             <a:r>
+              <a:rPr dirty="0"/>
               <a:t>The economics: monopsony power in football labor markets</a:t>
             </a:r>
           </a:p>
           <a:p>
             <a:r>
-              <a:t>What changed after Bosman — wages, agents, competitive balance</a:t>
-            </a:r>
+              <a:rPr dirty="0"/>
+              <a:t>What changed after Bosman </a:t>
+            </a:r>
+            <a:r>
+              <a:rPr lang="it-IT" dirty="0"/>
+              <a:t>(</a:t>
+            </a:r>
+            <a:r>
+              <a:rPr dirty="0"/>
+              <a:t>wages, agents, competitive balance</a:t>
+            </a:r>
+            <a:r>
+              <a:rPr lang="it-IT" dirty="0"/>
+              <a:t>).</a:t>
+            </a:r>
+            <a:endParaRPr dirty="0"/>
           </a:p>
         </p:txBody>
       </p:sp>
@@ -16451,8 +16529,21 @@
           <a:p>
             <a:r>
               <a:rPr dirty="0"/>
-              <a:t>In effect, a club retained rights over a player beyond the life of his contract — he could not simply walk away and sign elsewhere for free</a:t>
-            </a:r>
+              <a:t>In effect, a club retained rights over a player beyond the life of his contract </a:t>
+            </a:r>
+            <a:r>
+              <a:rPr lang="it-IT" dirty="0"/>
+              <a:t> (</a:t>
+            </a:r>
+            <a:r>
+              <a:rPr dirty="0"/>
+              <a:t>he could not simply walk away and sign elsewhere for free</a:t>
+            </a:r>
+            <a:r>
+              <a:rPr lang="it-IT" dirty="0"/>
+              <a:t>).</a:t>
+            </a:r>
+            <a:endParaRPr dirty="0"/>
           </a:p>
           <a:p>
             <a:r>
@@ -16461,17 +16552,21 @@
             </a:r>
             <a:r>
               <a:rPr lang="en-US" dirty="0"/>
-              <a:t>s (who had played in the domestic league for at least five year) </a:t>
-            </a:r>
+              <a:t> (who had played in the domestic league for at least five year) </a:t>
+            </a:r>
+          </a:p>
+          <a:p>
             <a:r>
               <a:rPr dirty="0"/>
-              <a:t>players in European competition — even for players from other EU member states</a:t>
-            </a:r>
-          </a:p>
-          <a:p>
+              <a:t>Together, these two rules sharply limited where a player could actually take his labor</a:t>
+            </a:r>
+            <a:r>
+              <a:rPr lang="it-IT" dirty="0"/>
+              <a:t>,</a:t>
+            </a:r>
             <a:r>
               <a:rPr dirty="0"/>
-              <a:t>Together, these two rules sharply limited where a player could actually take his labor — exactly the kind of restriction on mobility we saw with rent control and the NBA draft (L7–L8), just applied to workers instead of tenants or draft picks</a:t>
+              <a:t> exactly the kind of restriction on mobility we saw with rent control and the NBA draft (L7–L8), just applied to workers instead of tenants or draft picks</a:t>
             </a:r>
           </a:p>
         </p:txBody>
@@ -16538,32 +16633,62 @@
           <a:lstStyle/>
           <a:p>
             <a:r>
+              <a:rPr dirty="0"/>
               <a:t>Belgian midfielder under contract at RFC Liège (Belgium)</a:t>
             </a:r>
           </a:p>
           <a:p>
             <a:r>
-              <a:t>1990: his contract expired; Liège offered a renewal at roughly a quarter of his previous salary — he refused</a:t>
-            </a:r>
-          </a:p>
-          <a:p>
-            <a:r>
+              <a:rPr dirty="0"/>
+              <a:t>1990: his contract expired; Liège offered a renewal at roughly a quarter of his previous salary</a:t>
+            </a:r>
+            <a:r>
+              <a:rPr lang="it-IT" dirty="0"/>
+              <a:t>, </a:t>
+            </a:r>
+            <a:r>
+              <a:rPr dirty="0"/>
+              <a:t>he refused</a:t>
+            </a:r>
+          </a:p>
+          <a:p>
+            <a:r>
+              <a:rPr dirty="0"/>
               <a:t>He arranged a move to US Dunkerque (French second division)</a:t>
             </a:r>
           </a:p>
           <a:p>
             <a:r>
-              <a:t>Liège demanded a transfer fee from Dunkerque anyway, despite Bosman being out of contract — the fee was not paid and the deal collapsed</a:t>
-            </a:r>
-          </a:p>
-          <a:p>
-            <a:r>
+              <a:rPr dirty="0"/>
+              <a:t>Liège demanded a transfer fee from Dunkerque anyway, despite Bosman being out of contract</a:t>
+            </a:r>
+            <a:r>
+              <a:rPr lang="it-IT" dirty="0"/>
+              <a:t>,</a:t>
+            </a:r>
+            <a:r>
+              <a:rPr dirty="0"/>
+              <a:t> the fee was not paid and the deal collapsed</a:t>
+            </a:r>
+          </a:p>
+          <a:p>
+            <a:r>
+              <a:rPr dirty="0"/>
               <a:t>Liège suspended Bosman, leaving him without a club and on reduced pay</a:t>
             </a:r>
           </a:p>
           <a:p>
             <a:r>
-              <a:t>Bosman sued RFC Liège, the Belgian FA, and UEFA — arguing the transfer-fee system and nationality quotas violated his rights as an EU worker</a:t>
+              <a:rPr dirty="0"/>
+              <a:t>Bosman sued RFC Liège, the Belgian FA, and UEFA</a:t>
+            </a:r>
+            <a:r>
+              <a:rPr lang="it-IT" dirty="0"/>
+              <a:t>,</a:t>
+            </a:r>
+            <a:r>
+              <a:rPr dirty="0"/>
+              <a:t> arguing the transfer-fee system and nationality quotas violated his rights as an EU worker</a:t>
             </a:r>
           </a:p>
         </p:txBody>
@@ -16630,21 +16755,33 @@
           <a:lstStyle/>
           <a:p>
             <a:r>
-              <a:t>Article 48 of the EEC Treaty — freedom of movement for workers within the European Community (today Article 45 TFEU)</a:t>
-            </a:r>
-          </a:p>
-          <a:p>
-            <a:r>
+              <a:rPr dirty="0"/>
+              <a:t>Article 48 of the EEC Treaty</a:t>
+            </a:r>
+            <a:r>
+              <a:rPr lang="it-IT" dirty="0"/>
+              <a:t>:</a:t>
+            </a:r>
+            <a:r>
+              <a:rPr dirty="0"/>
+              <a:t> freedom of movement for workers within the European Community (today Article 45 TFEU)</a:t>
+            </a:r>
+          </a:p>
+          <a:p>
+            <a:r>
+              <a:rPr dirty="0"/>
               <a:t>Bosman’s argument: a professional footballer is a “worker” like any other, and cannot be blocked from taking a job in another member state</a:t>
             </a:r>
           </a:p>
           <a:p>
             <a:r>
+              <a:rPr dirty="0"/>
               <a:t>Court: European Court of Justice (ECJ), Case C-415/93</a:t>
             </a:r>
           </a:p>
           <a:p>
             <a:r>
+              <a:rPr dirty="0"/>
               <a:t>Referred by the Liège Court of Appeal in 1990; judgment delivered 15 December 1995</a:t>
             </a:r>
           </a:p>
@@ -16691,7 +16828,16 @@
           <a:lstStyle/>
           <a:p>
             <a:r>
-              <a:t>The Ruling — 15 December 1995</a:t>
+              <a:rPr dirty="0"/>
+              <a:t>The Ruling</a:t>
+            </a:r>
+            <a:r>
+              <a:rPr lang="it-IT" dirty="0"/>
+              <a:t>, </a:t>
+            </a:r>
+            <a:r>
+              <a:rPr dirty="0"/>
+              <a:t>15 December 1995</a:t>
             </a:r>
           </a:p>
         </p:txBody>
@@ -16712,29 +16858,50 @@
           <a:lstStyle/>
           <a:p>
             <a:r>
+              <a:rPr dirty="0"/>
               <a:t>Two distinct legal effects:</a:t>
             </a:r>
           </a:p>
           <a:p>
             <a:pPr lvl="1"/>
             <a:r>
+              <a:rPr dirty="0"/>
               <a:t>No transfer fee can be demanded for a player moving to a club in another EU member state once his contract has expired</a:t>
             </a:r>
           </a:p>
           <a:p>
             <a:pPr lvl="1"/>
             <a:r>
-              <a:t>Nationality quotas on EU players (UEFA’s “3+2 rule”) are unlawful — a club must be free to field any number of players who are EU nationals</a:t>
-            </a:r>
-          </a:p>
-          <a:p>
-            <a:r>
+              <a:rPr dirty="0"/>
+              <a:t>Nationality quotas on EU players (UEFA’s “3+2 rule”) are unlawful</a:t>
+            </a:r>
+            <a:r>
+              <a:rPr lang="it-IT" dirty="0"/>
+              <a:t>,</a:t>
+            </a:r>
+            <a:r>
+              <a:rPr dirty="0"/>
+              <a:t> a club must be free to field any number of players who are EU nationals</a:t>
+            </a:r>
+          </a:p>
+          <a:p>
+            <a:r>
+              <a:rPr dirty="0"/>
               <a:t>UEFA formally abolished the 3+2 rule on 19 February 1996</a:t>
             </a:r>
           </a:p>
           <a:p>
             <a:r>
-              <a:t>This did not end transfer fees altogether — a club can still be paid a fee for a player who is transferred while still under contract</a:t>
+              <a:rPr dirty="0"/>
+              <a:t>This did not end transfer fees altogether</a:t>
+            </a:r>
+            <a:r>
+              <a:rPr lang="it-IT" dirty="0"/>
+              <a:t>, </a:t>
+            </a:r>
+            <a:r>
+              <a:rPr dirty="0"/>
+              <a:t>a club can still be paid a fee for a player who is transferred while still under contract</a:t>
             </a:r>
           </a:p>
         </p:txBody>
@@ -16801,21 +16968,37 @@
           <a:lstStyle/>
           <a:p>
             <a:r>
-              <a:t>Before Bosman, a club effectively held exclusive rights to a player’s labor even after his contract ended — he could not credibly threaten to walk away</a:t>
-            </a:r>
-          </a:p>
-          <a:p>
-            <a:r>
+              <a:rPr dirty="0"/>
+              <a:t>Before Bosman, a club effectively held exclusive rights to a player’s labor even after his contract ended</a:t>
+            </a:r>
+            <a:r>
+              <a:rPr lang="it-IT" dirty="0"/>
+              <a:t>.</a:t>
+            </a:r>
+          </a:p>
+          <a:p>
+            <a:r>
+              <a:rPr dirty="0"/>
               <a:t>This is monopsony power: a market with (in the extreme) a single buyer of labor, rather than many competing buyers</a:t>
             </a:r>
           </a:p>
           <a:p>
             <a:r>
-              <a:t>Just like a monopolist restricts output below the competitive level, a monopsonist restricts employment below the competitive level — and pays a wage below what that labor is actually worth (its Value of Marginal Product, from L4)</a:t>
-            </a:r>
-          </a:p>
-          <a:p>
-            <a:r>
+              <a:rPr dirty="0"/>
+              <a:t>Just like a monopolist restricts output below the competitive level, a monopsonist restricts employment below the competitive level</a:t>
+            </a:r>
+            <a:r>
+              <a:rPr lang="it-IT" dirty="0"/>
+              <a:t>,</a:t>
+            </a:r>
+            <a:r>
+              <a:rPr dirty="0"/>
+              <a:t> and pays a wage below what that labor is actually worth (its Value of Marginal Product, from L4)</a:t>
+            </a:r>
+          </a:p>
+          <a:p>
+            <a:r>
+              <a:rPr dirty="0"/>
               <a:t>The next slide shows this formally</a:t>
             </a:r>
           </a:p>
@@ -16900,7 +17083,7 @@
         <p:spPr>
           <a:xfrm>
             <a:off x="500000" y="4106052"/>
-            <a:ext cx="8144000" cy="700000"/>
+            <a:ext cx="8144000" cy="415498"/>
           </a:xfrm>
           <a:prstGeom prst="rect">
             <a:avLst/>
@@ -16924,7 +17107,15 @@
             </a:r>
             <a:r>
               <a:rPr sz="1050" i="1" dirty="0"/>
-              <a:t>), then pays only Wm — below both the competitive wage and the player’s VMP.</a:t>
+              <a:t>), then pays only Wm </a:t>
+            </a:r>
+            <a:r>
+              <a:rPr lang="it-IT" sz="1050" i="1" dirty="0"/>
+              <a:t>, </a:t>
+            </a:r>
+            <a:r>
+              <a:rPr sz="1050" i="1" dirty="0"/>
+              <a:t>below both the competitive wage and the player’s VMP.</a:t>
             </a:r>
           </a:p>
         </p:txBody>
@@ -16991,21 +17182,33 @@
           <a:lstStyle/>
           <a:p>
             <a:r>
-              <a:t>An out-of-contract player can now simply leave for free — the threat of walking away is real and credible</a:t>
-            </a:r>
-          </a:p>
-          <a:p>
-            <a:r>
+              <a:rPr dirty="0"/>
+              <a:t>An out-of-contract player can now simply leave for </a:t>
+            </a:r>
+            <a:r>
+              <a:rPr dirty="0" err="1"/>
+              <a:t>fre</a:t>
+            </a:r>
+            <a:r>
+              <a:rPr lang="it-IT" dirty="0"/>
+              <a:t>e</a:t>
+            </a:r>
+          </a:p>
+          <a:p>
+            <a:r>
+              <a:rPr dirty="0"/>
               <a:t>This shifts bargaining power from clubs toward players (and their agents)</a:t>
             </a:r>
           </a:p>
           <a:p>
             <a:r>
+              <a:rPr dirty="0"/>
               <a:t>Clubs can no longer bank on transfer-fee income from out-of-contract sales, and players (correctly) demand to capture more of their own value directly, through salary</a:t>
             </a:r>
           </a:p>
           <a:p>
             <a:r>
+              <a:rPr dirty="0"/>
               <a:t>Result: money that used to flow to selling clubs as transfer fees increasingly flows to players as wages and signing bonuses instead</a:t>
             </a:r>
           </a:p>
@@ -18969,18 +19172,18 @@
 </file>
 
 <file path=customXml/item2.xml><?xml version="1.0" encoding="utf-8"?>
-<p:properties xmlns:p="http://schemas.microsoft.com/office/2006/metadata/properties" xmlns:xsi="http://www.w3.org/2001/XMLSchema-instance" xmlns:pc="http://schemas.microsoft.com/office/infopath/2007/PartnerControls">
-  <documentManagement/>
-</p:properties>
-</file>
-
-<file path=customXml/item3.xml><?xml version="1.0" encoding="utf-8"?>
 <?mso-contentType ?>
 <FormTemplates xmlns="http://schemas.microsoft.com/sharepoint/v3/contenttype/forms">
   <Display>DocumentLibraryForm</Display>
   <Edit>DocumentLibraryForm</Edit>
   <New>DocumentLibraryForm</New>
 </FormTemplates>
+</file>
+
+<file path=customXml/item3.xml><?xml version="1.0" encoding="utf-8"?>
+<p:properties xmlns:p="http://schemas.microsoft.com/office/2006/metadata/properties" xmlns:xsi="http://www.w3.org/2001/XMLSchema-instance" xmlns:pc="http://schemas.microsoft.com/office/infopath/2007/PartnerControls">
+  <documentManagement/>
+</p:properties>
 </file>
 
 <file path=customXml/itemProps1.xml><?xml version="1.0" encoding="utf-8"?>
@@ -19000,6 +19203,14 @@
 </file>
 
 <file path=customXml/itemProps2.xml><?xml version="1.0" encoding="utf-8"?>
+<ds:datastoreItem xmlns:ds="http://schemas.openxmlformats.org/officeDocument/2006/customXml" ds:itemID="{27479CE2-CFF2-495B-B6E0-2F66375CDBBB}">
+  <ds:schemaRefs>
+    <ds:schemaRef ds:uri="http://schemas.microsoft.com/sharepoint/v3/contenttype/forms"/>
+  </ds:schemaRefs>
+</ds:datastoreItem>
+</file>
+
+<file path=customXml/itemProps3.xml><?xml version="1.0" encoding="utf-8"?>
 <ds:datastoreItem xmlns:ds="http://schemas.openxmlformats.org/officeDocument/2006/customXml" ds:itemID="{3CAC7484-FE6E-40E6-83CA-83D55D847BA8}">
   <ds:schemaRefs>
     <ds:schemaRef ds:uri="http://schemas.microsoft.com/office/2006/documentManagement/types"/>
@@ -19012,12 +19223,4 @@
     <ds:schemaRef ds:uri="http://purl.org/dc/elements/1.1/"/>
   </ds:schemaRefs>
 </ds:datastoreItem>
-</file>
-
-<file path=customXml/itemProps3.xml><?xml version="1.0" encoding="utf-8"?>
-<ds:datastoreItem xmlns:ds="http://schemas.openxmlformats.org/officeDocument/2006/customXml" ds:itemID="{27479CE2-CFF2-495B-B6E0-2F66375CDBBB}">
-  <ds:schemaRefs>
-    <ds:schemaRef ds:uri="http://schemas.microsoft.com/sharepoint/v3/contenttype/forms"/>
-  </ds:schemaRefs>
-</ds:datastoreItem>
 </file>